--- a/public/fun/pack/pptx/weddingpro/결혼식프리미엄_17_러브스토리중심_코발트아이보리.pptx
+++ b/public/fun/pack/pptx/weddingpro/결혼식프리미엄_17_러브스토리중심_코발트아이보리.pptx
@@ -113,12 +113,12 @@
   <p:extLst>
     <p:ext uri="{521415D9-36F7-43E2-AB2F-B90AF26B5E84}">
       <p14:sectionLst xmlns:p14="http://schemas.microsoft.com/office/powerpoint/2010/main">
-        <p14:section name="시작" id="{BADAC3FA-8056-4390-843F-2D265FBBA917}">
+        <p14:section name="시작" id="{C7BC7F82-E132-4E41-9D48-884E974834B8}">
           <p14:sldIdLst>
             <p14:sldId id="256"/>
           </p14:sldIdLst>
         </p14:section>
-        <p14:section name="본문" id="{5F51C9ED-6A27-4632-9FE7-DC11B8553F61}">
+        <p14:section name="본문" id="{F53725D8-F3BC-47DA-A502-DF344607A568}">
           <p14:sldIdLst>
             <p14:sldId id="257"/>
             <p14:sldId id="258"/>
@@ -127,7 +127,7 @@
             <p14:sldId id="261"/>
           </p14:sldIdLst>
         </p14:section>
-        <p14:section name="마무리" id="{404F2FB0-AD51-4D8C-A4B4-261107B7A284}">
+        <p14:section name="마무리" id="{F3B420A0-20A2-49BA-B2DD-FE11BD7D3E21}">
           <p14:sldIdLst>
             <p14:sldId id="262"/>
           </p14:sldIdLst>
@@ -1968,7 +1968,7 @@
             </a:lvl1pPr>
           </a:lstStyle>
           <a:p>
-            <a:fld id="{AE7F86FD-CCBA-4B2D-AB9F-E3845630F331}" type="slidenum">
+            <a:fld id="{622CFD2F-966A-4295-8E3A-9C0511D29A70}" type="slidenum">
               <a:rPr lang="en-US"/>
               <a:t>‹#›</a:t>
             </a:fld>
@@ -3025,7 +3025,7 @@
             </a:lvl1pPr>
           </a:lstStyle>
           <a:p>
-            <a:fld id="{2306AAEC-AB07-468F-BD87-CB4D21C2EE15}" type="slidenum">
+            <a:fld id="{36EE914A-A951-48CA-BE19-D3229CFB48EF}" type="slidenum">
               <a:rPr lang="en-US"/>
               <a:t>‹#›</a:t>
             </a:fld>
@@ -3662,7 +3662,7 @@
             </a:lvl1pPr>
           </a:lstStyle>
           <a:p>
-            <a:fld id="{1D50E5C6-264A-48CA-986C-AC51C77B53CE}" type="slidenum">
+            <a:fld id="{A89F4FE0-2288-4BCE-BD8C-8C9E626D7F48}" type="slidenum">
               <a:rPr lang="en-US"/>
               <a:t>‹#›</a:t>
             </a:fld>
@@ -4529,7 +4529,7 @@
           <a:p>
             <a:r>
               <a:rPr lang="ko-KR"/>
-              <a:t>0000. 00. 00 · 예식장 이름</a:t>
+              <a:t>날짜 입력 · 예식장 이름</a:t>
             </a:r>
           </a:p>
         </p:txBody>
@@ -4752,7 +4752,7 @@
           <a:bodyPr/>
           <a:lstStyle/>
           <a:p>
-            <a:fld id="{E6B8FDD6-31AE-44C8-B2B5-1F1BCFAA27C2}" type="slidenum">
+            <a:fld id="{D38C68C9-7CE0-4387-9B06-9F944EB3788F}" type="slidenum">
               <a:rPr lang="en-US"/>
               <a:t>‹#›</a:t>
             </a:fld>
@@ -5158,7 +5158,7 @@
           <a:bodyPr/>
           <a:lstStyle/>
           <a:p>
-            <a:fld id="{9673E00D-CC3B-4DAE-89D0-C1A0D276B02D}" type="slidenum">
+            <a:fld id="{2AAFBD49-9842-4D26-92A7-CD3087062C30}" type="slidenum">
               <a:rPr lang="en-US"/>
               <a:t>‹#›</a:t>
             </a:fld>
@@ -6000,7 +6000,7 @@
           <a:bodyPr/>
           <a:lstStyle/>
           <a:p>
-            <a:fld id="{762C1294-CB45-4887-B3AE-37CB69A6B10E}" type="slidenum">
+            <a:fld id="{6BDAB298-CC51-462C-933B-A1E8139AEFA0}" type="slidenum">
               <a:rPr lang="en-US"/>
               <a:t>‹#›</a:t>
             </a:fld>
@@ -7534,7 +7534,7 @@
           <a:bodyPr/>
           <a:lstStyle/>
           <a:p>
-            <a:fld id="{660E7A63-6E91-423F-9CBA-D465F7CAA8EC}" type="slidenum">
+            <a:fld id="{0CB4D6DA-D9A1-403F-833C-EA66878830E3}" type="slidenum">
               <a:rPr lang="en-US"/>
               <a:t>‹#›</a:t>
             </a:fld>
@@ -7622,7 +7622,7 @@
           <a:bodyPr/>
           <a:lstStyle/>
           <a:p>
-            <a:fld id="{48BF325D-9E3B-45EC-8DD7-944A525E3F1A}" type="slidenum">
+            <a:fld id="{1E9DBED1-6380-4481-A6FA-E4B1A58191F7}" type="slidenum">
               <a:rPr lang="en-US"/>
               <a:t>‹#›</a:t>
             </a:fld>
